--- a/docs/figs/findpeaks.pptx
+++ b/docs/figs/findpeaks.pptx
@@ -6,12 +6,13 @@
   </p:sldMasterIdLst>
   <p:sldIdLst>
     <p:sldId id="259" r:id="rId2"/>
-    <p:sldId id="260" r:id="rId3"/>
-    <p:sldId id="261" r:id="rId4"/>
-    <p:sldId id="265" r:id="rId5"/>
-    <p:sldId id="262" r:id="rId6"/>
-    <p:sldId id="263" r:id="rId7"/>
-    <p:sldId id="264" r:id="rId8"/>
+    <p:sldId id="266" r:id="rId3"/>
+    <p:sldId id="267" r:id="rId4"/>
+    <p:sldId id="261" r:id="rId5"/>
+    <p:sldId id="265" r:id="rId6"/>
+    <p:sldId id="262" r:id="rId7"/>
+    <p:sldId id="263" r:id="rId8"/>
+    <p:sldId id="264" r:id="rId9"/>
   </p:sldIdLst>
   <p:sldSz cx="12192000" cy="6858000"/>
   <p:notesSz cx="6858000" cy="9144000"/>
@@ -267,7 +268,7 @@
           <a:p>
             <a:fld id="{BD4D06C3-4B07-427E-9224-90193AEF272F}" type="datetimeFigureOut">
               <a:rPr lang="en-NL" smtClean="0"/>
-              <a:t>30/08/2025</a:t>
+              <a:t>31/08/2025</a:t>
             </a:fld>
             <a:endParaRPr lang="en-NL"/>
           </a:p>
@@ -467,7 +468,7 @@
           <a:p>
             <a:fld id="{BD4D06C3-4B07-427E-9224-90193AEF272F}" type="datetimeFigureOut">
               <a:rPr lang="en-NL" smtClean="0"/>
-              <a:t>30/08/2025</a:t>
+              <a:t>31/08/2025</a:t>
             </a:fld>
             <a:endParaRPr lang="en-NL"/>
           </a:p>
@@ -677,7 +678,7 @@
           <a:p>
             <a:fld id="{BD4D06C3-4B07-427E-9224-90193AEF272F}" type="datetimeFigureOut">
               <a:rPr lang="en-NL" smtClean="0"/>
-              <a:t>30/08/2025</a:t>
+              <a:t>31/08/2025</a:t>
             </a:fld>
             <a:endParaRPr lang="en-NL"/>
           </a:p>
@@ -877,7 +878,7 @@
           <a:p>
             <a:fld id="{BD4D06C3-4B07-427E-9224-90193AEF272F}" type="datetimeFigureOut">
               <a:rPr lang="en-NL" smtClean="0"/>
-              <a:t>30/08/2025</a:t>
+              <a:t>31/08/2025</a:t>
             </a:fld>
             <a:endParaRPr lang="en-NL"/>
           </a:p>
@@ -1153,7 +1154,7 @@
           <a:p>
             <a:fld id="{BD4D06C3-4B07-427E-9224-90193AEF272F}" type="datetimeFigureOut">
               <a:rPr lang="en-NL" smtClean="0"/>
-              <a:t>30/08/2025</a:t>
+              <a:t>31/08/2025</a:t>
             </a:fld>
             <a:endParaRPr lang="en-NL"/>
           </a:p>
@@ -1421,7 +1422,7 @@
           <a:p>
             <a:fld id="{BD4D06C3-4B07-427E-9224-90193AEF272F}" type="datetimeFigureOut">
               <a:rPr lang="en-NL" smtClean="0"/>
-              <a:t>30/08/2025</a:t>
+              <a:t>31/08/2025</a:t>
             </a:fld>
             <a:endParaRPr lang="en-NL"/>
           </a:p>
@@ -1836,7 +1837,7 @@
           <a:p>
             <a:fld id="{BD4D06C3-4B07-427E-9224-90193AEF272F}" type="datetimeFigureOut">
               <a:rPr lang="en-NL" smtClean="0"/>
-              <a:t>30/08/2025</a:t>
+              <a:t>31/08/2025</a:t>
             </a:fld>
             <a:endParaRPr lang="en-NL"/>
           </a:p>
@@ -1978,7 +1979,7 @@
           <a:p>
             <a:fld id="{BD4D06C3-4B07-427E-9224-90193AEF272F}" type="datetimeFigureOut">
               <a:rPr lang="en-NL" smtClean="0"/>
-              <a:t>30/08/2025</a:t>
+              <a:t>31/08/2025</a:t>
             </a:fld>
             <a:endParaRPr lang="en-NL"/>
           </a:p>
@@ -2091,7 +2092,7 @@
           <a:p>
             <a:fld id="{BD4D06C3-4B07-427E-9224-90193AEF272F}" type="datetimeFigureOut">
               <a:rPr lang="en-NL" smtClean="0"/>
-              <a:t>30/08/2025</a:t>
+              <a:t>31/08/2025</a:t>
             </a:fld>
             <a:endParaRPr lang="en-NL"/>
           </a:p>
@@ -2404,7 +2405,7 @@
           <a:p>
             <a:fld id="{BD4D06C3-4B07-427E-9224-90193AEF272F}" type="datetimeFigureOut">
               <a:rPr lang="en-NL" smtClean="0"/>
-              <a:t>30/08/2025</a:t>
+              <a:t>31/08/2025</a:t>
             </a:fld>
             <a:endParaRPr lang="en-NL"/>
           </a:p>
@@ -2693,7 +2694,7 @@
           <a:p>
             <a:fld id="{BD4D06C3-4B07-427E-9224-90193AEF272F}" type="datetimeFigureOut">
               <a:rPr lang="en-NL" smtClean="0"/>
-              <a:t>30/08/2025</a:t>
+              <a:t>31/08/2025</a:t>
             </a:fld>
             <a:endParaRPr lang="en-NL"/>
           </a:p>
@@ -2936,7 +2937,7 @@
           <a:p>
             <a:fld id="{BD4D06C3-4B07-427E-9224-90193AEF272F}" type="datetimeFigureOut">
               <a:rPr lang="en-NL" smtClean="0"/>
-              <a:t>30/08/2025</a:t>
+              <a:t>31/08/2025</a:t>
             </a:fld>
             <a:endParaRPr lang="en-NL"/>
           </a:p>
@@ -4007,7 +4008,7 @@
         </p:blipFill>
         <p:spPr>
           <a:xfrm>
-            <a:off x="499349" y="1338439"/>
+            <a:off x="508544" y="1236839"/>
             <a:ext cx="4406148" cy="4707207"/>
           </a:xfrm>
           <a:prstGeom prst="rect">
@@ -4112,7 +4113,13 @@
   <p:cSld>
     <p:spTree>
       <p:nvGrpSpPr>
-        <p:cNvPr id="1" name=""/>
+        <p:cNvPr id="1" name="">
+          <a:extLst>
+            <a:ext uri="{FF2B5EF4-FFF2-40B4-BE49-F238E27FC236}">
+              <a16:creationId xmlns:a16="http://schemas.microsoft.com/office/drawing/2014/main" id="{1E6B3E66-438C-6AA9-0D77-2C67A4FA148F}"/>
+            </a:ext>
+          </a:extLst>
+        </p:cNvPr>
         <p:cNvGrpSpPr/>
         <p:nvPr/>
       </p:nvGrpSpPr>
@@ -4126,10 +4133,10 @@
       </p:grpSpPr>
       <p:sp>
         <p:nvSpPr>
-          <p:cNvPr id="88" name="Rectangle: Rounded Corners 87">
-            <a:extLst>
-              <a:ext uri="{FF2B5EF4-FFF2-40B4-BE49-F238E27FC236}">
-                <a16:creationId xmlns:a16="http://schemas.microsoft.com/office/drawing/2014/main" id="{F917F48E-D621-B337-BB66-AC73E89DB9FE}"/>
+          <p:cNvPr id="5" name="Rectangle: Rounded Corners 4">
+            <a:extLst>
+              <a:ext uri="{FF2B5EF4-FFF2-40B4-BE49-F238E27FC236}">
+                <a16:creationId xmlns:a16="http://schemas.microsoft.com/office/drawing/2014/main" id="{4CFCCC08-6946-00B1-E234-FAE24D80A36B}"/>
               </a:ext>
             </a:extLst>
           </p:cNvPr>
@@ -4138,8 +4145,8 @@
         </p:nvSpPr>
         <p:spPr>
           <a:xfrm>
-            <a:off x="5345199" y="373620"/>
-            <a:ext cx="6347452" cy="4269686"/>
+            <a:off x="4834947" y="3373137"/>
+            <a:ext cx="5338533" cy="2954199"/>
           </a:xfrm>
           <a:prstGeom prst="roundRect">
             <a:avLst>
@@ -4148,7 +4155,8 @@
           </a:prstGeom>
           <a:solidFill>
             <a:schemeClr val="bg1">
-              <a:lumMod val="95000"/>
+              <a:lumMod val="85000"/>
+              <a:alpha val="20000"/>
             </a:schemeClr>
           </a:solidFill>
           <a:ln>
@@ -4190,10 +4198,10 @@
       </p:sp>
       <p:sp>
         <p:nvSpPr>
-          <p:cNvPr id="6" name="Rectangle: Rounded Corners 5">
-            <a:extLst>
-              <a:ext uri="{FF2B5EF4-FFF2-40B4-BE49-F238E27FC236}">
-                <a16:creationId xmlns:a16="http://schemas.microsoft.com/office/drawing/2014/main" id="{CEFF67DE-3B8E-6310-A742-4D701A7FD2FE}"/>
+          <p:cNvPr id="88" name="Rectangle: Rounded Corners 87">
+            <a:extLst>
+              <a:ext uri="{FF2B5EF4-FFF2-40B4-BE49-F238E27FC236}">
+                <a16:creationId xmlns:a16="http://schemas.microsoft.com/office/drawing/2014/main" id="{B5F0BED8-5094-C014-4200-810C2FC71311}"/>
               </a:ext>
             </a:extLst>
           </p:cNvPr>
@@ -4202,18 +4210,18 @@
         </p:nvSpPr>
         <p:spPr>
           <a:xfrm>
-            <a:off x="351784" y="373620"/>
-            <a:ext cx="4719669" cy="4223547"/>
+            <a:off x="4834947" y="377252"/>
+            <a:ext cx="5338533" cy="2860223"/>
           </a:xfrm>
           <a:prstGeom prst="roundRect">
             <a:avLst>
-              <a:gd name="adj" fmla="val 2665"/>
+              <a:gd name="adj" fmla="val 4049"/>
             </a:avLst>
           </a:prstGeom>
           <a:solidFill>
-            <a:schemeClr val="tx1">
+            <a:schemeClr val="bg1">
               <a:lumMod val="85000"/>
-              <a:lumOff val="15000"/>
+              <a:alpha val="20000"/>
             </a:schemeClr>
           </a:solidFill>
           <a:ln>
@@ -4247,9 +4255,6 @@
               <a:solidFill>
                 <a:schemeClr val="tx1"/>
               </a:solidFill>
-              <a:highlight>
-                <a:srgbClr val="FFFF00"/>
-              </a:highlight>
               <a:latin typeface="+mj-lt"/>
               <a:cs typeface="Times New Roman" panose="02020603050405020304" pitchFamily="18" charset="0"/>
             </a:endParaRPr>
@@ -4261,7 +4266,7 @@
           <p:cNvPr id="30" name="TextBox 29">
             <a:extLst>
               <a:ext uri="{FF2B5EF4-FFF2-40B4-BE49-F238E27FC236}">
-                <a16:creationId xmlns:a16="http://schemas.microsoft.com/office/drawing/2014/main" id="{AA2006F1-C1D2-689B-A61F-AA666073F1BC}"/>
+                <a16:creationId xmlns:a16="http://schemas.microsoft.com/office/drawing/2014/main" id="{91908368-E7BC-D2E1-3DFB-F8DB472F1ADC}"/>
               </a:ext>
             </a:extLst>
           </p:cNvPr>
@@ -4299,7 +4304,24 @@
                 <a:latin typeface="Courier New" panose="02070309020205020404" pitchFamily="49" charset="0"/>
                 <a:cs typeface="Courier New" panose="02070309020205020404" pitchFamily="49" charset="0"/>
               </a:rPr>
-              <a:t>pip install d3blocks</a:t>
+              <a:t>pip install </a:t>
+            </a:r>
+            <a:r>
+              <a:rPr lang="en-US" sz="1400" b="1" dirty="0" err="1">
+                <a:solidFill>
+                  <a:schemeClr val="bg1"/>
+                </a:solidFill>
+                <a:effectLst>
+                  <a:outerShdw blurRad="38100" dist="38100" dir="2700000" algn="tl">
+                    <a:srgbClr val="000000">
+                      <a:alpha val="43137"/>
+                    </a:srgbClr>
+                  </a:outerShdw>
+                </a:effectLst>
+                <a:latin typeface="Courier New" panose="02070309020205020404" pitchFamily="49" charset="0"/>
+                <a:cs typeface="Courier New" panose="02070309020205020404" pitchFamily="49" charset="0"/>
+              </a:rPr>
+              <a:t>findpeaks</a:t>
             </a:r>
             <a:endParaRPr lang="en-NL" sz="1400" b="1" dirty="0">
               <a:solidFill>
@@ -4320,10 +4342,10 @@
       </p:sp>
       <p:pic>
         <p:nvPicPr>
-          <p:cNvPr id="3" name="Picture 2">
-            <a:extLst>
-              <a:ext uri="{FF2B5EF4-FFF2-40B4-BE49-F238E27FC236}">
-                <a16:creationId xmlns:a16="http://schemas.microsoft.com/office/drawing/2014/main" id="{CB09C3EA-0CA7-4451-33DA-C058206366E4}"/>
+          <p:cNvPr id="19" name="Picture 18">
+            <a:extLst>
+              <a:ext uri="{FF2B5EF4-FFF2-40B4-BE49-F238E27FC236}">
+                <a16:creationId xmlns:a16="http://schemas.microsoft.com/office/drawing/2014/main" id="{7A69FD06-3FFA-6713-A09C-7775A47EF169}"/>
               </a:ext>
             </a:extLst>
           </p:cNvPr>
@@ -4332,26 +4354,27 @@
           </p:cNvPicPr>
           <p:nvPr/>
         </p:nvPicPr>
-        <p:blipFill rotWithShape="1">
+        <p:blipFill>
           <a:blip r:embed="rId2">
             <a:clrChange>
               <a:clrFrom>
-                <a:srgbClr val="1A1A1A"/>
+                <a:srgbClr val="FFFFFF"/>
               </a:clrFrom>
               <a:clrTo>
-                <a:srgbClr val="1A1A1A">
+                <a:srgbClr val="FFFFFF">
                   <a:alpha val="0"/>
                 </a:srgbClr>
               </a:clrTo>
             </a:clrChange>
           </a:blip>
-          <a:srcRect r="9678"/>
-          <a:stretch/>
+          <a:stretch>
+            <a:fillRect/>
+          </a:stretch>
         </p:blipFill>
         <p:spPr>
           <a:xfrm>
-            <a:off x="499349" y="1026039"/>
-            <a:ext cx="4485622" cy="3441060"/>
+            <a:off x="4925357" y="380756"/>
+            <a:ext cx="5096546" cy="2897313"/>
           </a:xfrm>
           <a:prstGeom prst="rect">
             <a:avLst/>
@@ -4360,10 +4383,10 @@
       </p:pic>
       <p:pic>
         <p:nvPicPr>
-          <p:cNvPr id="12" name="Picture 11" descr="A diagram of a network&#10;&#10;Description automatically generated">
-            <a:extLst>
-              <a:ext uri="{FF2B5EF4-FFF2-40B4-BE49-F238E27FC236}">
-                <a16:creationId xmlns:a16="http://schemas.microsoft.com/office/drawing/2014/main" id="{5EC99075-A582-0F5E-D181-05000D5BB693}"/>
+          <p:cNvPr id="20" name="Picture 19">
+            <a:extLst>
+              <a:ext uri="{FF2B5EF4-FFF2-40B4-BE49-F238E27FC236}">
+                <a16:creationId xmlns:a16="http://schemas.microsoft.com/office/drawing/2014/main" id="{045FDB3D-0DB2-52FF-8C42-D773AFE9D5C1}"/>
               </a:ext>
             </a:extLst>
           </p:cNvPr>
@@ -4376,19 +4399,14 @@
           <a:blip r:embed="rId3">
             <a:clrChange>
               <a:clrFrom>
-                <a:srgbClr val="FEFEFE"/>
+                <a:srgbClr val="FFFFFF"/>
               </a:clrFrom>
               <a:clrTo>
-                <a:srgbClr val="FEFEFE">
+                <a:srgbClr val="FFFFFF">
                   <a:alpha val="0"/>
                 </a:srgbClr>
               </a:clrTo>
             </a:clrChange>
-            <a:extLst>
-              <a:ext uri="{28A0092B-C50C-407E-A947-70E740481C1C}">
-                <a14:useLocalDpi xmlns:a14="http://schemas.microsoft.com/office/drawing/2010/main" val="0"/>
-              </a:ext>
-            </a:extLst>
           </a:blip>
           <a:stretch>
             <a:fillRect/>
@@ -4396,18 +4414,153 @@
         </p:blipFill>
         <p:spPr>
           <a:xfrm>
-            <a:off x="5398818" y="315204"/>
-            <a:ext cx="6509354" cy="4720841"/>
+            <a:off x="4925356" y="3419130"/>
+            <a:ext cx="5115708" cy="2908206"/>
           </a:xfrm>
           <a:prstGeom prst="rect">
             <a:avLst/>
           </a:prstGeom>
         </p:spPr>
       </p:pic>
+      <p:pic>
+        <p:nvPicPr>
+          <p:cNvPr id="28" name="Picture 27">
+            <a:extLst>
+              <a:ext uri="{FF2B5EF4-FFF2-40B4-BE49-F238E27FC236}">
+                <a16:creationId xmlns:a16="http://schemas.microsoft.com/office/drawing/2014/main" id="{977ADE58-84F5-13E7-D4A3-18E4116761DD}"/>
+              </a:ext>
+            </a:extLst>
+          </p:cNvPr>
+          <p:cNvPicPr>
+            <a:picLocks noChangeAspect="1"/>
+          </p:cNvPicPr>
+          <p:nvPr/>
+        </p:nvPicPr>
+        <p:blipFill>
+          <a:blip r:embed="rId4"/>
+          <a:stretch>
+            <a:fillRect/>
+          </a:stretch>
+        </p:blipFill>
+        <p:spPr>
+          <a:xfrm>
+            <a:off x="366933" y="402482"/>
+            <a:ext cx="4235668" cy="5924854"/>
+          </a:xfrm>
+          <a:prstGeom prst="roundRect">
+            <a:avLst>
+              <a:gd name="adj" fmla="val 4167"/>
+            </a:avLst>
+          </a:prstGeom>
+          <a:solidFill>
+            <a:srgbClr val="FFFFFF"/>
+          </a:solidFill>
+          <a:ln w="76200" cap="sq">
+            <a:solidFill>
+              <a:srgbClr val="292929"/>
+            </a:solidFill>
+            <a:miter lim="800000"/>
+          </a:ln>
+          <a:effectLst>
+            <a:reflection blurRad="12700" stA="28000" endPos="28000" dist="5000" dir="5400000" sy="-100000" algn="bl" rotWithShape="0"/>
+          </a:effectLst>
+          <a:scene3d>
+            <a:camera prst="orthographicFront"/>
+            <a:lightRig rig="threePt" dir="t">
+              <a:rot lat="0" lon="0" rev="2700000"/>
+            </a:lightRig>
+          </a:scene3d>
+          <a:sp3d>
+            <a:bevelT h="38100"/>
+            <a:contourClr>
+              <a:srgbClr val="C0C0C0"/>
+            </a:contourClr>
+          </a:sp3d>
+        </p:spPr>
+      </p:pic>
+      <p:sp>
+        <p:nvSpPr>
+          <p:cNvPr id="29" name="TextBox 28">
+            <a:extLst>
+              <a:ext uri="{FF2B5EF4-FFF2-40B4-BE49-F238E27FC236}">
+                <a16:creationId xmlns:a16="http://schemas.microsoft.com/office/drawing/2014/main" id="{319EF17E-1DC4-2A66-C02C-CEDEAE69B759}"/>
+              </a:ext>
+            </a:extLst>
+          </p:cNvPr>
+          <p:cNvSpPr txBox="1"/>
+          <p:nvPr/>
+        </p:nvSpPr>
+        <p:spPr>
+          <a:xfrm>
+            <a:off x="1035972" y="6019559"/>
+            <a:ext cx="2897589" cy="307777"/>
+          </a:xfrm>
+          <a:prstGeom prst="rect">
+            <a:avLst/>
+          </a:prstGeom>
+          <a:noFill/>
+        </p:spPr>
+        <p:txBody>
+          <a:bodyPr wrap="square" rtlCol="0">
+            <a:spAutoFit/>
+          </a:bodyPr>
+          <a:lstStyle/>
+          <a:p>
+            <a:r>
+              <a:rPr lang="en-US" sz="1400" b="1" dirty="0">
+                <a:solidFill>
+                  <a:schemeClr val="bg1"/>
+                </a:solidFill>
+                <a:effectLst>
+                  <a:outerShdw blurRad="38100" dist="38100" dir="2700000" algn="tl">
+                    <a:srgbClr val="000000">
+                      <a:alpha val="43137"/>
+                    </a:srgbClr>
+                  </a:outerShdw>
+                </a:effectLst>
+                <a:latin typeface="Courier New" panose="02070309020205020404" pitchFamily="49" charset="0"/>
+                <a:cs typeface="Courier New" panose="02070309020205020404" pitchFamily="49" charset="0"/>
+              </a:rPr>
+              <a:t>pip install </a:t>
+            </a:r>
+            <a:r>
+              <a:rPr lang="en-US" sz="1400" b="1" dirty="0" err="1">
+                <a:solidFill>
+                  <a:schemeClr val="bg1"/>
+                </a:solidFill>
+                <a:effectLst>
+                  <a:outerShdw blurRad="38100" dist="38100" dir="2700000" algn="tl">
+                    <a:srgbClr val="000000">
+                      <a:alpha val="43137"/>
+                    </a:srgbClr>
+                  </a:outerShdw>
+                </a:effectLst>
+                <a:latin typeface="Courier New" panose="02070309020205020404" pitchFamily="49" charset="0"/>
+                <a:cs typeface="Courier New" panose="02070309020205020404" pitchFamily="49" charset="0"/>
+              </a:rPr>
+              <a:t>findpeaks</a:t>
+            </a:r>
+            <a:endParaRPr lang="en-NL" sz="1400" b="1" dirty="0">
+              <a:solidFill>
+                <a:schemeClr val="bg1"/>
+              </a:solidFill>
+              <a:effectLst>
+                <a:outerShdw blurRad="38100" dist="38100" dir="2700000" algn="tl">
+                  <a:srgbClr val="000000">
+                    <a:alpha val="43137"/>
+                  </a:srgbClr>
+                </a:outerShdw>
+              </a:effectLst>
+              <a:latin typeface="Courier New" panose="02070309020205020404" pitchFamily="49" charset="0"/>
+              <a:cs typeface="Courier New" panose="02070309020205020404" pitchFamily="49" charset="0"/>
+            </a:endParaRPr>
+          </a:p>
+        </p:txBody>
+      </p:sp>
     </p:spTree>
     <p:extLst>
       <p:ext uri="{BB962C8B-B14F-4D97-AF65-F5344CB8AC3E}">
-        <p14:creationId xmlns:p14="http://schemas.microsoft.com/office/powerpoint/2010/main" val="3467901912"/>
+        <p14:creationId xmlns:p14="http://schemas.microsoft.com/office/powerpoint/2010/main" val="2032496332"/>
       </p:ext>
     </p:extLst>
   </p:cSld>
@@ -4418,6 +4571,376 @@
 </file>
 
 <file path=ppt/slides/slide3.xml><?xml version="1.0" encoding="utf-8"?>
+<p:sld xmlns:a="http://schemas.openxmlformats.org/drawingml/2006/main" xmlns:r="http://schemas.openxmlformats.org/officeDocument/2006/relationships" xmlns:p="http://schemas.openxmlformats.org/presentationml/2006/main">
+  <p:cSld>
+    <p:spTree>
+      <p:nvGrpSpPr>
+        <p:cNvPr id="1" name="">
+          <a:extLst>
+            <a:ext uri="{FF2B5EF4-FFF2-40B4-BE49-F238E27FC236}">
+              <a16:creationId xmlns:a16="http://schemas.microsoft.com/office/drawing/2014/main" id="{F3A99CF1-7336-380F-75F4-E8DC4733824A}"/>
+            </a:ext>
+          </a:extLst>
+        </p:cNvPr>
+        <p:cNvGrpSpPr/>
+        <p:nvPr/>
+      </p:nvGrpSpPr>
+      <p:grpSpPr>
+        <a:xfrm>
+          <a:off x="0" y="0"/>
+          <a:ext cx="0" cy="0"/>
+          <a:chOff x="0" y="0"/>
+          <a:chExt cx="0" cy="0"/>
+        </a:xfrm>
+      </p:grpSpPr>
+      <p:pic>
+        <p:nvPicPr>
+          <p:cNvPr id="24" name="Picture 23">
+            <a:extLst>
+              <a:ext uri="{FF2B5EF4-FFF2-40B4-BE49-F238E27FC236}">
+                <a16:creationId xmlns:a16="http://schemas.microsoft.com/office/drawing/2014/main" id="{11301AD0-42EF-33A8-361B-59AC28BD3A52}"/>
+              </a:ext>
+            </a:extLst>
+          </p:cNvPr>
+          <p:cNvPicPr>
+            <a:picLocks noChangeAspect="1"/>
+          </p:cNvPicPr>
+          <p:nvPr/>
+        </p:nvPicPr>
+        <p:blipFill>
+          <a:blip r:embed="rId2"/>
+          <a:stretch>
+            <a:fillRect/>
+          </a:stretch>
+        </p:blipFill>
+        <p:spPr>
+          <a:xfrm>
+            <a:off x="323744" y="377252"/>
+            <a:ext cx="4102311" cy="5797848"/>
+          </a:xfrm>
+          <a:prstGeom prst="roundRect">
+            <a:avLst>
+              <a:gd name="adj" fmla="val 8594"/>
+            </a:avLst>
+          </a:prstGeom>
+          <a:solidFill>
+            <a:srgbClr val="FFFFFF">
+              <a:shade val="85000"/>
+            </a:srgbClr>
+          </a:solidFill>
+          <a:ln>
+            <a:noFill/>
+          </a:ln>
+          <a:effectLst>
+            <a:reflection blurRad="12700" stA="38000" endPos="28000" dist="5000" dir="5400000" sy="-100000" algn="bl" rotWithShape="0"/>
+          </a:effectLst>
+        </p:spPr>
+      </p:pic>
+      <p:sp>
+        <p:nvSpPr>
+          <p:cNvPr id="5" name="Rectangle: Rounded Corners 4">
+            <a:extLst>
+              <a:ext uri="{FF2B5EF4-FFF2-40B4-BE49-F238E27FC236}">
+                <a16:creationId xmlns:a16="http://schemas.microsoft.com/office/drawing/2014/main" id="{F0E6844C-2AEA-5666-B5B9-253100D3DE73}"/>
+              </a:ext>
+            </a:extLst>
+          </p:cNvPr>
+          <p:cNvSpPr/>
+          <p:nvPr/>
+        </p:nvSpPr>
+        <p:spPr>
+          <a:xfrm>
+            <a:off x="4834947" y="3373138"/>
+            <a:ext cx="5338533" cy="2744102"/>
+          </a:xfrm>
+          <a:prstGeom prst="roundRect">
+            <a:avLst>
+              <a:gd name="adj" fmla="val 4049"/>
+            </a:avLst>
+          </a:prstGeom>
+          <a:solidFill>
+            <a:schemeClr val="bg1">
+              <a:lumMod val="85000"/>
+              <a:alpha val="20000"/>
+            </a:schemeClr>
+          </a:solidFill>
+          <a:ln>
+            <a:solidFill>
+              <a:schemeClr val="tx1"/>
+            </a:solidFill>
+          </a:ln>
+        </p:spPr>
+        <p:style>
+          <a:lnRef idx="2">
+            <a:schemeClr val="accent1">
+              <a:shade val="50000"/>
+            </a:schemeClr>
+          </a:lnRef>
+          <a:fillRef idx="1">
+            <a:schemeClr val="accent1"/>
+          </a:fillRef>
+          <a:effectRef idx="0">
+            <a:schemeClr val="accent1"/>
+          </a:effectRef>
+          <a:fontRef idx="minor">
+            <a:schemeClr val="lt1"/>
+          </a:fontRef>
+        </p:style>
+        <p:txBody>
+          <a:bodyPr rtlCol="0" anchor="ctr"/>
+          <a:lstStyle/>
+          <a:p>
+            <a:pPr algn="ctr"/>
+            <a:endParaRPr lang="en-NL" sz="1600" dirty="0">
+              <a:solidFill>
+                <a:schemeClr val="tx1"/>
+              </a:solidFill>
+              <a:latin typeface="+mj-lt"/>
+              <a:cs typeface="Times New Roman" panose="02020603050405020304" pitchFamily="18" charset="0"/>
+            </a:endParaRPr>
+          </a:p>
+        </p:txBody>
+      </p:sp>
+      <p:sp>
+        <p:nvSpPr>
+          <p:cNvPr id="88" name="Rectangle: Rounded Corners 87">
+            <a:extLst>
+              <a:ext uri="{FF2B5EF4-FFF2-40B4-BE49-F238E27FC236}">
+                <a16:creationId xmlns:a16="http://schemas.microsoft.com/office/drawing/2014/main" id="{056EF72A-56BE-2015-E86F-6F72135743E4}"/>
+              </a:ext>
+            </a:extLst>
+          </p:cNvPr>
+          <p:cNvSpPr/>
+          <p:nvPr/>
+        </p:nvSpPr>
+        <p:spPr>
+          <a:xfrm>
+            <a:off x="4834947" y="377252"/>
+            <a:ext cx="5338533" cy="2744102"/>
+          </a:xfrm>
+          <a:prstGeom prst="roundRect">
+            <a:avLst>
+              <a:gd name="adj" fmla="val 4049"/>
+            </a:avLst>
+          </a:prstGeom>
+          <a:solidFill>
+            <a:schemeClr val="bg1">
+              <a:lumMod val="85000"/>
+              <a:alpha val="20000"/>
+            </a:schemeClr>
+          </a:solidFill>
+          <a:ln>
+            <a:solidFill>
+              <a:schemeClr val="tx1"/>
+            </a:solidFill>
+          </a:ln>
+        </p:spPr>
+        <p:style>
+          <a:lnRef idx="2">
+            <a:schemeClr val="accent1">
+              <a:shade val="50000"/>
+            </a:schemeClr>
+          </a:lnRef>
+          <a:fillRef idx="1">
+            <a:schemeClr val="accent1"/>
+          </a:fillRef>
+          <a:effectRef idx="0">
+            <a:schemeClr val="accent1"/>
+          </a:effectRef>
+          <a:fontRef idx="minor">
+            <a:schemeClr val="lt1"/>
+          </a:fontRef>
+        </p:style>
+        <p:txBody>
+          <a:bodyPr rtlCol="0" anchor="ctr"/>
+          <a:lstStyle/>
+          <a:p>
+            <a:pPr algn="ctr"/>
+            <a:endParaRPr lang="en-NL" sz="1600" dirty="0">
+              <a:solidFill>
+                <a:schemeClr val="tx1"/>
+              </a:solidFill>
+              <a:latin typeface="+mj-lt"/>
+              <a:cs typeface="Times New Roman" panose="02020603050405020304" pitchFamily="18" charset="0"/>
+            </a:endParaRPr>
+          </a:p>
+        </p:txBody>
+      </p:sp>
+      <p:pic>
+        <p:nvPicPr>
+          <p:cNvPr id="3" name="Picture 2">
+            <a:extLst>
+              <a:ext uri="{FF2B5EF4-FFF2-40B4-BE49-F238E27FC236}">
+                <a16:creationId xmlns:a16="http://schemas.microsoft.com/office/drawing/2014/main" id="{DE6C9D45-BD45-73B4-46B1-FF8D92F3220B}"/>
+              </a:ext>
+            </a:extLst>
+          </p:cNvPr>
+          <p:cNvPicPr>
+            <a:picLocks noChangeAspect="1"/>
+          </p:cNvPicPr>
+          <p:nvPr/>
+        </p:nvPicPr>
+        <p:blipFill>
+          <a:blip r:embed="rId3">
+            <a:clrChange>
+              <a:clrFrom>
+                <a:srgbClr val="FFFFFF"/>
+              </a:clrFrom>
+              <a:clrTo>
+                <a:srgbClr val="FFFFFF">
+                  <a:alpha val="0"/>
+                </a:srgbClr>
+              </a:clrTo>
+            </a:clrChange>
+          </a:blip>
+          <a:stretch>
+            <a:fillRect/>
+          </a:stretch>
+        </p:blipFill>
+        <p:spPr>
+          <a:xfrm>
+            <a:off x="4903526" y="403445"/>
+            <a:ext cx="5051303" cy="2775770"/>
+          </a:xfrm>
+          <a:prstGeom prst="rect">
+            <a:avLst/>
+          </a:prstGeom>
+        </p:spPr>
+      </p:pic>
+      <p:pic>
+        <p:nvPicPr>
+          <p:cNvPr id="6" name="Picture 5">
+            <a:extLst>
+              <a:ext uri="{FF2B5EF4-FFF2-40B4-BE49-F238E27FC236}">
+                <a16:creationId xmlns:a16="http://schemas.microsoft.com/office/drawing/2014/main" id="{616DAAC2-95EF-5785-196C-9CAE9126143B}"/>
+              </a:ext>
+            </a:extLst>
+          </p:cNvPr>
+          <p:cNvPicPr>
+            <a:picLocks noChangeAspect="1"/>
+          </p:cNvPicPr>
+          <p:nvPr/>
+        </p:nvPicPr>
+        <p:blipFill>
+          <a:blip r:embed="rId4">
+            <a:clrChange>
+              <a:clrFrom>
+                <a:srgbClr val="FFFFFF"/>
+              </a:clrFrom>
+              <a:clrTo>
+                <a:srgbClr val="FFFFFF">
+                  <a:alpha val="0"/>
+                </a:srgbClr>
+              </a:clrTo>
+            </a:clrChange>
+          </a:blip>
+          <a:stretch>
+            <a:fillRect/>
+          </a:stretch>
+        </p:blipFill>
+        <p:spPr>
+          <a:xfrm>
+            <a:off x="4884904" y="3430999"/>
+            <a:ext cx="5088549" cy="2744101"/>
+          </a:xfrm>
+          <a:prstGeom prst="rect">
+            <a:avLst/>
+          </a:prstGeom>
+        </p:spPr>
+      </p:pic>
+      <p:sp>
+        <p:nvSpPr>
+          <p:cNvPr id="12" name="TextBox 11">
+            <a:extLst>
+              <a:ext uri="{FF2B5EF4-FFF2-40B4-BE49-F238E27FC236}">
+                <a16:creationId xmlns:a16="http://schemas.microsoft.com/office/drawing/2014/main" id="{8F87F15F-24BC-81F9-B7EA-D92BCD06E6CF}"/>
+              </a:ext>
+            </a:extLst>
+          </p:cNvPr>
+          <p:cNvSpPr txBox="1"/>
+          <p:nvPr/>
+        </p:nvSpPr>
+        <p:spPr>
+          <a:xfrm>
+            <a:off x="1106794" y="5810759"/>
+            <a:ext cx="2897589" cy="307777"/>
+          </a:xfrm>
+          <a:prstGeom prst="rect">
+            <a:avLst/>
+          </a:prstGeom>
+          <a:noFill/>
+        </p:spPr>
+        <p:txBody>
+          <a:bodyPr wrap="square" rtlCol="0">
+            <a:spAutoFit/>
+          </a:bodyPr>
+          <a:lstStyle/>
+          <a:p>
+            <a:r>
+              <a:rPr lang="en-US" sz="1400" b="1" dirty="0">
+                <a:solidFill>
+                  <a:schemeClr val="bg1"/>
+                </a:solidFill>
+                <a:effectLst>
+                  <a:outerShdw blurRad="38100" dist="38100" dir="2700000" algn="tl">
+                    <a:srgbClr val="000000">
+                      <a:alpha val="43137"/>
+                    </a:srgbClr>
+                  </a:outerShdw>
+                </a:effectLst>
+                <a:latin typeface="Courier New" panose="02070309020205020404" pitchFamily="49" charset="0"/>
+                <a:cs typeface="Courier New" panose="02070309020205020404" pitchFamily="49" charset="0"/>
+              </a:rPr>
+              <a:t>pip install </a:t>
+            </a:r>
+            <a:r>
+              <a:rPr lang="en-US" sz="1400" b="1" dirty="0" err="1">
+                <a:solidFill>
+                  <a:schemeClr val="bg1"/>
+                </a:solidFill>
+                <a:effectLst>
+                  <a:outerShdw blurRad="38100" dist="38100" dir="2700000" algn="tl">
+                    <a:srgbClr val="000000">
+                      <a:alpha val="43137"/>
+                    </a:srgbClr>
+                  </a:outerShdw>
+                </a:effectLst>
+                <a:latin typeface="Courier New" panose="02070309020205020404" pitchFamily="49" charset="0"/>
+                <a:cs typeface="Courier New" panose="02070309020205020404" pitchFamily="49" charset="0"/>
+              </a:rPr>
+              <a:t>findpeaks</a:t>
+            </a:r>
+            <a:endParaRPr lang="en-NL" sz="1400" b="1" dirty="0">
+              <a:solidFill>
+                <a:schemeClr val="bg1"/>
+              </a:solidFill>
+              <a:effectLst>
+                <a:outerShdw blurRad="38100" dist="38100" dir="2700000" algn="tl">
+                  <a:srgbClr val="000000">
+                    <a:alpha val="43137"/>
+                  </a:srgbClr>
+                </a:outerShdw>
+              </a:effectLst>
+              <a:latin typeface="Courier New" panose="02070309020205020404" pitchFamily="49" charset="0"/>
+              <a:cs typeface="Courier New" panose="02070309020205020404" pitchFamily="49" charset="0"/>
+            </a:endParaRPr>
+          </a:p>
+        </p:txBody>
+      </p:sp>
+    </p:spTree>
+    <p:extLst>
+      <p:ext uri="{BB962C8B-B14F-4D97-AF65-F5344CB8AC3E}">
+        <p14:creationId xmlns:p14="http://schemas.microsoft.com/office/powerpoint/2010/main" val="976059087"/>
+      </p:ext>
+    </p:extLst>
+  </p:cSld>
+  <p:clrMapOvr>
+    <a:masterClrMapping/>
+  </p:clrMapOvr>
+</p:sld>
+</file>
+
+<file path=ppt/slides/slide4.xml><?xml version="1.0" encoding="utf-8"?>
 <p:sld xmlns:a="http://schemas.openxmlformats.org/drawingml/2006/main" xmlns:r="http://schemas.openxmlformats.org/officeDocument/2006/relationships" xmlns:p="http://schemas.openxmlformats.org/presentationml/2006/main">
   <p:cSld>
     <p:spTree>
@@ -4681,7 +5204,7 @@
 </p:sld>
 </file>
 
-<file path=ppt/slides/slide4.xml><?xml version="1.0" encoding="utf-8"?>
+<file path=ppt/slides/slide5.xml><?xml version="1.0" encoding="utf-8"?>
 <p:sld xmlns:a="http://schemas.openxmlformats.org/drawingml/2006/main" xmlns:r="http://schemas.openxmlformats.org/officeDocument/2006/relationships" xmlns:p="http://schemas.openxmlformats.org/presentationml/2006/main">
   <p:cSld>
     <p:spTree>
@@ -5199,7 +5722,7 @@
 </p:sld>
 </file>
 
-<file path=ppt/slides/slide5.xml><?xml version="1.0" encoding="utf-8"?>
+<file path=ppt/slides/slide6.xml><?xml version="1.0" encoding="utf-8"?>
 <p:sld xmlns:a="http://schemas.openxmlformats.org/drawingml/2006/main" xmlns:r="http://schemas.openxmlformats.org/officeDocument/2006/relationships" xmlns:p="http://schemas.openxmlformats.org/presentationml/2006/main">
   <p:cSld>
     <p:spTree>
@@ -5288,7 +5811,7 @@
 </p:sld>
 </file>
 
-<file path=ppt/slides/slide6.xml><?xml version="1.0" encoding="utf-8"?>
+<file path=ppt/slides/slide7.xml><?xml version="1.0" encoding="utf-8"?>
 <p:sld xmlns:a="http://schemas.openxmlformats.org/drawingml/2006/main" xmlns:r="http://schemas.openxmlformats.org/officeDocument/2006/relationships" xmlns:p="http://schemas.openxmlformats.org/presentationml/2006/main">
   <p:cSld>
     <p:spTree>
@@ -5533,7 +6056,7 @@
 </p:sld>
 </file>
 
-<file path=ppt/slides/slide7.xml><?xml version="1.0" encoding="utf-8"?>
+<file path=ppt/slides/slide8.xml><?xml version="1.0" encoding="utf-8"?>
 <p:sld xmlns:a="http://schemas.openxmlformats.org/drawingml/2006/main" xmlns:r="http://schemas.openxmlformats.org/officeDocument/2006/relationships" xmlns:p="http://schemas.openxmlformats.org/presentationml/2006/main">
   <p:cSld>
     <p:spTree>
